--- a/GenAI/wk3_LLM_Prompting/1_LLM_Definition_Limitation.pptx
+++ b/GenAI/wk3_LLM_Prompting/1_LLM_Definition_Limitation.pptx
@@ -280,7 +280,7 @@
           <a:p>
             <a:fld id="{6EBA79C2-4FE3-4D0C-AFFB-D4FCE050D5EA}" type="datetimeFigureOut">
               <a:rPr lang="en-IN" smtClean="0"/>
-              <a:t>26-09-2026</a:t>
+              <a:t>13-10-2026</a:t>
             </a:fld>
             <a:endParaRPr lang="en-IN"/>
           </a:p>
@@ -517,7 +517,7 @@
           <a:p>
             <a:fld id="{6EBA79C2-4FE3-4D0C-AFFB-D4FCE050D5EA}" type="datetimeFigureOut">
               <a:rPr lang="en-IN" smtClean="0"/>
-              <a:t>26-09-2026</a:t>
+              <a:t>13-10-2026</a:t>
             </a:fld>
             <a:endParaRPr lang="en-IN"/>
           </a:p>
@@ -727,7 +727,7 @@
           <a:p>
             <a:fld id="{6EBA79C2-4FE3-4D0C-AFFB-D4FCE050D5EA}" type="datetimeFigureOut">
               <a:rPr lang="en-IN" smtClean="0"/>
-              <a:t>26-09-2026</a:t>
+              <a:t>13-10-2026</a:t>
             </a:fld>
             <a:endParaRPr lang="en-IN"/>
           </a:p>
@@ -927,7 +927,7 @@
           <a:p>
             <a:fld id="{6EBA79C2-4FE3-4D0C-AFFB-D4FCE050D5EA}" type="datetimeFigureOut">
               <a:rPr lang="en-IN" smtClean="0"/>
-              <a:t>26-09-2026</a:t>
+              <a:t>13-10-2026</a:t>
             </a:fld>
             <a:endParaRPr lang="en-IN"/>
           </a:p>
@@ -1203,7 +1203,7 @@
           <a:p>
             <a:fld id="{6EBA79C2-4FE3-4D0C-AFFB-D4FCE050D5EA}" type="datetimeFigureOut">
               <a:rPr lang="en-IN" smtClean="0"/>
-              <a:t>26-09-2026</a:t>
+              <a:t>13-10-2026</a:t>
             </a:fld>
             <a:endParaRPr lang="en-IN"/>
           </a:p>
@@ -1471,7 +1471,7 @@
           <a:p>
             <a:fld id="{6EBA79C2-4FE3-4D0C-AFFB-D4FCE050D5EA}" type="datetimeFigureOut">
               <a:rPr lang="en-IN" smtClean="0"/>
-              <a:t>26-09-2026</a:t>
+              <a:t>13-10-2026</a:t>
             </a:fld>
             <a:endParaRPr lang="en-IN"/>
           </a:p>
@@ -1886,7 +1886,7 @@
           <a:p>
             <a:fld id="{6EBA79C2-4FE3-4D0C-AFFB-D4FCE050D5EA}" type="datetimeFigureOut">
               <a:rPr lang="en-IN" smtClean="0"/>
-              <a:t>26-09-2026</a:t>
+              <a:t>13-10-2026</a:t>
             </a:fld>
             <a:endParaRPr lang="en-IN"/>
           </a:p>
@@ -2028,7 +2028,7 @@
           <a:p>
             <a:fld id="{6EBA79C2-4FE3-4D0C-AFFB-D4FCE050D5EA}" type="datetimeFigureOut">
               <a:rPr lang="en-IN" smtClean="0"/>
-              <a:t>26-09-2026</a:t>
+              <a:t>13-10-2026</a:t>
             </a:fld>
             <a:endParaRPr lang="en-IN"/>
           </a:p>
@@ -2141,7 +2141,7 @@
           <a:p>
             <a:fld id="{6EBA79C2-4FE3-4D0C-AFFB-D4FCE050D5EA}" type="datetimeFigureOut">
               <a:rPr lang="en-IN" smtClean="0"/>
-              <a:t>26-09-2026</a:t>
+              <a:t>13-10-2026</a:t>
             </a:fld>
             <a:endParaRPr lang="en-IN"/>
           </a:p>
@@ -2454,7 +2454,7 @@
           <a:p>
             <a:fld id="{6EBA79C2-4FE3-4D0C-AFFB-D4FCE050D5EA}" type="datetimeFigureOut">
               <a:rPr lang="en-IN" smtClean="0"/>
-              <a:t>26-09-2026</a:t>
+              <a:t>13-10-2026</a:t>
             </a:fld>
             <a:endParaRPr lang="en-IN"/>
           </a:p>
@@ -2743,7 +2743,7 @@
           <a:p>
             <a:fld id="{6EBA79C2-4FE3-4D0C-AFFB-D4FCE050D5EA}" type="datetimeFigureOut">
               <a:rPr lang="en-IN" smtClean="0"/>
-              <a:t>26-09-2026</a:t>
+              <a:t>13-10-2026</a:t>
             </a:fld>
             <a:endParaRPr lang="en-IN"/>
           </a:p>
@@ -2986,7 +2986,7 @@
           <a:p>
             <a:fld id="{6EBA79C2-4FE3-4D0C-AFFB-D4FCE050D5EA}" type="datetimeFigureOut">
               <a:rPr lang="en-IN" smtClean="0"/>
-              <a:t>26-09-2026</a:t>
+              <a:t>13-10-2026</a:t>
             </a:fld>
             <a:endParaRPr lang="en-IN"/>
           </a:p>
@@ -3425,7 +3425,7 @@
         </p:nvSpPr>
         <p:spPr>
           <a:xfrm>
-            <a:off x="3047238" y="3198168"/>
+            <a:off x="3048762" y="2228904"/>
             <a:ext cx="6094476" cy="1323439"/>
           </a:xfrm>
           <a:prstGeom prst="rect">
@@ -3449,7 +3449,7 @@
                   </a:schemeClr>
                 </a:solidFill>
               </a:rPr>
-              <a:t>LLM </a:t>
+              <a:t>Large Language Model</a:t>
             </a:r>
           </a:p>
           <a:p>
@@ -3463,9 +3463,20 @@
                   </a:schemeClr>
                 </a:solidFill>
               </a:rPr>
-              <a:t>Large Language Model</a:t>
-            </a:r>
-            <a:endParaRPr lang="en-IN" sz="4000" dirty="0">
+              <a:t>( LLM </a:t>
+            </a:r>
+            <a:r>
+              <a:rPr lang="en-IN" sz="4000" b="1" dirty="0">
+                <a:solidFill>
+                  <a:schemeClr val="accent6">
+                    <a:lumMod val="60000"/>
+                    <a:lumOff val="40000"/>
+                  </a:schemeClr>
+                </a:solidFill>
+              </a:rPr>
+              <a:t>)</a:t>
+            </a:r>
+            <a:endParaRPr lang="en-IN" sz="4000" b="1">
               <a:solidFill>
                 <a:schemeClr val="accent6">
                   <a:lumMod val="60000"/>
@@ -3856,6 +3867,98 @@
               </a:rPr>
               <a:t>Example</a:t>
             </a:r>
+          </a:p>
+        </p:txBody>
+      </p:sp>
+      <p:sp>
+        <p:nvSpPr>
+          <p:cNvPr id="2" name="Arrow: Right 1">
+            <a:extLst>
+              <a:ext uri="{FF2B5EF4-FFF2-40B4-BE49-F238E27FC236}">
+                <a16:creationId xmlns:a16="http://schemas.microsoft.com/office/drawing/2014/main" id="{41092E6C-A29E-3D14-E46B-CD75CB3AA956}"/>
+              </a:ext>
+            </a:extLst>
+          </p:cNvPr>
+          <p:cNvSpPr/>
+          <p:nvPr/>
+        </p:nvSpPr>
+        <p:spPr>
+          <a:xfrm>
+            <a:off x="6775704" y="2962656"/>
+            <a:ext cx="566928" cy="466344"/>
+          </a:xfrm>
+          <a:prstGeom prst="rightArrow">
+            <a:avLst/>
+          </a:prstGeom>
+        </p:spPr>
+        <p:style>
+          <a:lnRef idx="2">
+            <a:schemeClr val="accent1">
+              <a:shade val="15000"/>
+            </a:schemeClr>
+          </a:lnRef>
+          <a:fillRef idx="1">
+            <a:schemeClr val="accent1"/>
+          </a:fillRef>
+          <a:effectRef idx="0">
+            <a:schemeClr val="accent1"/>
+          </a:effectRef>
+          <a:fontRef idx="minor">
+            <a:schemeClr val="lt1"/>
+          </a:fontRef>
+        </p:style>
+        <p:txBody>
+          <a:bodyPr rtlCol="0" anchor="ctr"/>
+          <a:lstStyle/>
+          <a:p>
+            <a:pPr algn="ctr"/>
+            <a:endParaRPr lang="en-IN"/>
+          </a:p>
+        </p:txBody>
+      </p:sp>
+      <p:sp>
+        <p:nvSpPr>
+          <p:cNvPr id="6" name="Arrow: Right 5">
+            <a:extLst>
+              <a:ext uri="{FF2B5EF4-FFF2-40B4-BE49-F238E27FC236}">
+                <a16:creationId xmlns:a16="http://schemas.microsoft.com/office/drawing/2014/main" id="{29EF0437-76EC-E036-FEB3-8DD518F44AD7}"/>
+              </a:ext>
+            </a:extLst>
+          </p:cNvPr>
+          <p:cNvSpPr/>
+          <p:nvPr/>
+        </p:nvSpPr>
+        <p:spPr>
+          <a:xfrm>
+            <a:off x="6775704" y="4819887"/>
+            <a:ext cx="566928" cy="466344"/>
+          </a:xfrm>
+          <a:prstGeom prst="rightArrow">
+            <a:avLst/>
+          </a:prstGeom>
+        </p:spPr>
+        <p:style>
+          <a:lnRef idx="2">
+            <a:schemeClr val="accent1">
+              <a:shade val="15000"/>
+            </a:schemeClr>
+          </a:lnRef>
+          <a:fillRef idx="1">
+            <a:schemeClr val="accent1"/>
+          </a:fillRef>
+          <a:effectRef idx="0">
+            <a:schemeClr val="accent1"/>
+          </a:effectRef>
+          <a:fontRef idx="minor">
+            <a:schemeClr val="lt1"/>
+          </a:fontRef>
+        </p:style>
+        <p:txBody>
+          <a:bodyPr rtlCol="0" anchor="ctr"/>
+          <a:lstStyle/>
+          <a:p>
+            <a:pPr algn="ctr"/>
+            <a:endParaRPr lang="en-IN"/>
           </a:p>
         </p:txBody>
       </p:sp>
@@ -4357,6 +4460,17 @@
           </a:p>
           <a:p>
             <a:r>
+              <a:rPr lang="en-IN" sz="2400">
+                <a:solidFill>
+                  <a:schemeClr val="accent6">
+                    <a:lumMod val="60000"/>
+                    <a:lumOff val="40000"/>
+                  </a:schemeClr>
+                </a:solidFill>
+              </a:rPr>
+              <a:t>An </a:t>
+            </a:r>
+            <a:r>
               <a:rPr lang="en-IN" sz="2400" dirty="0">
                 <a:solidFill>
                   <a:schemeClr val="accent6">
@@ -4365,7 +4479,7 @@
                   </a:schemeClr>
                 </a:solidFill>
               </a:rPr>
-              <a:t>An LLM is a type of AI </a:t>
+              <a:t>AI </a:t>
             </a:r>
             <a:r>
               <a:rPr lang="en-IN" sz="2400">
@@ -4413,6 +4527,17 @@
           </a:p>
           <a:p>
             <a:r>
+              <a:rPr lang="en-IN" sz="2400">
+                <a:solidFill>
+                  <a:schemeClr val="accent6">
+                    <a:lumMod val="60000"/>
+                    <a:lumOff val="40000"/>
+                  </a:schemeClr>
+                </a:solidFill>
+              </a:rPr>
+              <a:t>Examples: Models </a:t>
+            </a:r>
+            <a:r>
               <a:rPr lang="en-IN" sz="2400" dirty="0">
                 <a:solidFill>
                   <a:schemeClr val="accent6">
@@ -4421,7 +4546,7 @@
                   </a:schemeClr>
                 </a:solidFill>
               </a:rPr>
-              <a:t>Examples include models from OpenAI, Google, Anthropic, Meta, and others.</a:t>
+              <a:t>from OpenAI, Google, Anthropic, Meta, and others.</a:t>
             </a:r>
           </a:p>
         </p:txBody>
@@ -4575,7 +4700,7 @@
         <p:spPr>
           <a:xfrm>
             <a:off x="3776471" y="156924"/>
-            <a:ext cx="5065776" cy="369332"/>
+            <a:ext cx="5065776" cy="461665"/>
           </a:xfrm>
           <a:prstGeom prst="rect">
             <a:avLst/>
@@ -4589,7 +4714,7 @@
           <a:lstStyle/>
           <a:p>
             <a:r>
-              <a:rPr lang="en-US" dirty="0">
+              <a:rPr lang="en-US" sz="2400" dirty="0">
                 <a:solidFill>
                   <a:schemeClr val="accent6">
                     <a:lumMod val="60000"/>
@@ -4600,7 +4725,7 @@
               <a:t>F</a:t>
             </a:r>
             <a:r>
-              <a:rPr lang="en-IN" dirty="0" err="1">
+              <a:rPr lang="en-IN" sz="2400" dirty="0" err="1">
                 <a:solidFill>
                   <a:schemeClr val="accent6">
                     <a:lumMod val="60000"/>
@@ -4611,7 +4736,7 @@
               <a:t>orest</a:t>
             </a:r>
             <a:r>
-              <a:rPr lang="en-IN" dirty="0">
+              <a:rPr lang="en-IN" sz="2400" dirty="0">
                 <a:solidFill>
                   <a:schemeClr val="accent6">
                     <a:lumMod val="60000"/>
@@ -5127,7 +5252,7 @@
         </p:nvSpPr>
         <p:spPr>
           <a:xfrm>
-            <a:off x="5084063" y="606270"/>
+            <a:off x="4919471" y="112494"/>
             <a:ext cx="5065776" cy="369332"/>
           </a:xfrm>
           <a:prstGeom prst="rect">
